--- a/dist/초2/국어/이야기와쓰기/초2_국어_이야기와쓰기_03_겪은일쓰기.pptx
+++ b/dist/초2/국어/이야기와쓰기/초2_국어_이야기와쓰기_03_겪은일쓰기.pptx
@@ -119,13 +119,13 @@
   <p:extLst>
     <p:ext uri="{521415D9-36F7-43E2-AB2F-B90AF26B5E84}">
       <p14:sectionLst xmlns:p14="http://schemas.microsoft.com/office/powerpoint/2010/main">
-        <p14:section name="도입" id="{21072bdc-740e-23c4-3f84-3d8789c72b40}">
+        <p14:section name="도입" id="{e7b22d70-2664-9ad1-cb1a-dd8f118307e9}">
           <p14:sldIdLst>
             <p14:sldId id="256"/>
             <p14:sldId id="257"/>
           </p14:sldIdLst>
         </p14:section>
-        <p14:section name="개념" id="{227d0fa1-fa79-2eb9-a987-01550e2dba05}">
+        <p14:section name="개념" id="{cd035e8d-ce6c-571e-bd8d-eb89b9b267f6}">
           <p14:sldIdLst>
             <p14:sldId id="258"/>
             <p14:sldId id="259"/>
@@ -133,25 +133,25 @@
             <p14:sldId id="261"/>
           </p14:sldIdLst>
         </p14:section>
-        <p14:section name="연습" id="{d3b1c62e-00d6-79d9-1d75-3b4ce07595d6}">
+        <p14:section name="연습" id="{7136f928-2959-db5c-99a2-3ef3f26b628f}">
           <p14:sldIdLst>
             <p14:sldId id="262"/>
             <p14:sldId id="263"/>
           </p14:sldIdLst>
         </p14:section>
-        <p14:section name="확인" id="{ac487547-a38e-7e58-b944-b635b4394c43}">
+        <p14:section name="확인" id="{e33a5b44-1e76-5568-40ac-b7c7557028ac}">
           <p14:sldIdLst>
             <p14:sldId id="264"/>
             <p14:sldId id="265"/>
             <p14:sldId id="266"/>
           </p14:sldIdLst>
         </p14:section>
-        <p14:section name="정리" id="{becb9f4c-5f04-3944-ddba-3afdafd79284}">
+        <p14:section name="정리" id="{29d5c7e1-9eeb-f5e0-d2a0-654415d3de72}">
           <p14:sldIdLst>
             <p14:sldId id="267"/>
           </p14:sldIdLst>
         </p14:section>
-        <p14:section name="보충" id="{58c231c9-cced-6234-670e-761259acca4a}">
+        <p14:section name="보충" id="{f2db74ae-2afe-9f63-2596-1778a4b7de3e}">
           <p14:sldIdLst>
             <p14:sldId id="268"/>
           </p14:sldIdLst>
